--- a/ComputerProgramming-SmartManufacturing/Class 07 Comparison and Logical Operator/class 07.pptx
+++ b/ComputerProgramming-SmartManufacturing/Class 07 Comparison and Logical Operator/class 07.pptx
@@ -262,7 +262,7 @@
           <a:p>
             <a:fld id="{B9DC1951-C9FB-4263-9AC6-481F0F204F0A}" type="datetimeFigureOut">
               <a:rPr lang="en-US" smtClean="0"/>
-              <a:t>6/22/2025</a:t>
+              <a:t>8/12/2025</a:t>
             </a:fld>
             <a:endParaRPr lang="en-US"/>
           </a:p>
@@ -460,7 +460,7 @@
           <a:p>
             <a:fld id="{B9DC1951-C9FB-4263-9AC6-481F0F204F0A}" type="datetimeFigureOut">
               <a:rPr lang="en-US" smtClean="0"/>
-              <a:t>6/22/2025</a:t>
+              <a:t>8/12/2025</a:t>
             </a:fld>
             <a:endParaRPr lang="en-US"/>
           </a:p>
@@ -668,7 +668,7 @@
           <a:p>
             <a:fld id="{B9DC1951-C9FB-4263-9AC6-481F0F204F0A}" type="datetimeFigureOut">
               <a:rPr lang="en-US" smtClean="0"/>
-              <a:t>6/22/2025</a:t>
+              <a:t>8/12/2025</a:t>
             </a:fld>
             <a:endParaRPr lang="en-US"/>
           </a:p>
@@ -866,7 +866,7 @@
           <a:p>
             <a:fld id="{B9DC1951-C9FB-4263-9AC6-481F0F204F0A}" type="datetimeFigureOut">
               <a:rPr lang="en-US" smtClean="0"/>
-              <a:t>6/22/2025</a:t>
+              <a:t>8/12/2025</a:t>
             </a:fld>
             <a:endParaRPr lang="en-US"/>
           </a:p>
@@ -1141,7 +1141,7 @@
           <a:p>
             <a:fld id="{B9DC1951-C9FB-4263-9AC6-481F0F204F0A}" type="datetimeFigureOut">
               <a:rPr lang="en-US" smtClean="0"/>
-              <a:t>6/22/2025</a:t>
+              <a:t>8/12/2025</a:t>
             </a:fld>
             <a:endParaRPr lang="en-US"/>
           </a:p>
@@ -1406,7 +1406,7 @@
           <a:p>
             <a:fld id="{B9DC1951-C9FB-4263-9AC6-481F0F204F0A}" type="datetimeFigureOut">
               <a:rPr lang="en-US" smtClean="0"/>
-              <a:t>6/22/2025</a:t>
+              <a:t>8/12/2025</a:t>
             </a:fld>
             <a:endParaRPr lang="en-US"/>
           </a:p>
@@ -1818,7 +1818,7 @@
           <a:p>
             <a:fld id="{B9DC1951-C9FB-4263-9AC6-481F0F204F0A}" type="datetimeFigureOut">
               <a:rPr lang="en-US" smtClean="0"/>
-              <a:t>6/22/2025</a:t>
+              <a:t>8/12/2025</a:t>
             </a:fld>
             <a:endParaRPr lang="en-US"/>
           </a:p>
@@ -1959,7 +1959,7 @@
           <a:p>
             <a:fld id="{B9DC1951-C9FB-4263-9AC6-481F0F204F0A}" type="datetimeFigureOut">
               <a:rPr lang="en-US" smtClean="0"/>
-              <a:t>6/22/2025</a:t>
+              <a:t>8/12/2025</a:t>
             </a:fld>
             <a:endParaRPr lang="en-US"/>
           </a:p>
@@ -2072,7 +2072,7 @@
           <a:p>
             <a:fld id="{B9DC1951-C9FB-4263-9AC6-481F0F204F0A}" type="datetimeFigureOut">
               <a:rPr lang="en-US" smtClean="0"/>
-              <a:t>6/22/2025</a:t>
+              <a:t>8/12/2025</a:t>
             </a:fld>
             <a:endParaRPr lang="en-US"/>
           </a:p>
@@ -2383,7 +2383,7 @@
           <a:p>
             <a:fld id="{B9DC1951-C9FB-4263-9AC6-481F0F204F0A}" type="datetimeFigureOut">
               <a:rPr lang="en-US" smtClean="0"/>
-              <a:t>6/22/2025</a:t>
+              <a:t>8/12/2025</a:t>
             </a:fld>
             <a:endParaRPr lang="en-US"/>
           </a:p>
@@ -2671,7 +2671,7 @@
           <a:p>
             <a:fld id="{B9DC1951-C9FB-4263-9AC6-481F0F204F0A}" type="datetimeFigureOut">
               <a:rPr lang="en-US" smtClean="0"/>
-              <a:t>6/22/2025</a:t>
+              <a:t>8/12/2025</a:t>
             </a:fld>
             <a:endParaRPr lang="en-US"/>
           </a:p>
@@ -2912,7 +2912,7 @@
           <a:p>
             <a:fld id="{B9DC1951-C9FB-4263-9AC6-481F0F204F0A}" type="datetimeFigureOut">
               <a:rPr lang="en-US" smtClean="0"/>
-              <a:t>6/22/2025</a:t>
+              <a:t>8/12/2025</a:t>
             </a:fld>
             <a:endParaRPr lang="en-US"/>
           </a:p>
@@ -6140,6 +6140,6 @@
 
 <file path=docMetadata/LabelInfo.xml><?xml version="1.0" encoding="utf-8"?>
 <clbl:labelList xmlns:clbl="http://schemas.microsoft.com/office/2020/mipLabelMetadata">
-  <clbl:label id="{f42aa342-8706-4288-bd11-ebb85995028c}" enabled="1" method="Standard" siteId="{72f988bf-86f1-41af-91ab-2d7cd011db47}" contentBits="0" removed="0"/>
+  <clbl:label id="{87ba5c36-b7cf-4793-bbc2-bd5b3a9f95ca}" enabled="1" method="Privileged" siteId="{72f988bf-86f1-41af-91ab-2d7cd011db47}" contentBits="0" removed="0"/>
 </clbl:labelList>
 </file>